--- a/10-Knowledge-Products/KP2-GIF/videos/module_1/en/decks/KP2_M1_1.6_Deck_v0.1.pptx
+++ b/10-Knowledge-Products/KP2-GIF/videos/module_1/en/decks/KP2_M1_1.6_Deck_v0.1.pptx
@@ -1295,7 +1295,7 @@
           <a:lstStyle/>
           <a:p>
             <a:r>
-              <a:t>VO: One warning the stakeholder map makes visible. All of this — the tiers, the providers and consumers, the agreements — needs a body that governs the framework as a whole: that admits new members, sets the service levels, and resolves disputes when two agencies disagree. An interoperability platform with no owner decays in its second year, when the founding enthusiasm fades and no one is accountable for keeping it healthy. Designing that governing body is the subject of a later topic. The stakeholder map is what shows you why it is not optional.</a:t>
+              <a:t>VO: One warning the stakeholder map makes visible. All of this — the tiers, the providers and consumers, the agreements — needs a body that governs the framework as a whole: that admits new members, sets the service levels, and resolves disputes when two agencies disagree. An interoperability platform with no owner decays in its second year, when the founding enthusiasm fades and no one is accountable for keeping it healthy. Designing that governing body is the subject of a later module. The stakeholder map is what shows you why it is not optional.</a:t>
             </a:r>
           </a:p>
         </p:txBody>

--- a/10-Knowledge-Products/KP2-GIF/videos/module_1/en/decks/KP2_M1_1.6_Deck_v0.1.pptx
+++ b/10-Knowledge-Products/KP2-GIF/videos/module_1/en/decks/KP2_M1_1.6_Deck_v0.1.pptx
@@ -11641,7 +11641,7 @@
                 </a:solidFill>
                 <a:latin typeface="Arial"/>
               </a:rPr>
-              <a:t>KP2 · MODULE 1 · VIDEO 1.6</a:t>
+              <a:t>MODULE 1 · VIDEO 1.6</a:t>
             </a:r>
           </a:p>
         </p:txBody>
